--- a/Lessons/10_convolutional_networks/Slides/convolutional_networks_slides.pptx
+++ b/Lessons/10_convolutional_networks/Slides/convolutional_networks_slides.pptx
@@ -13972,8 +13972,8 @@
         </p:blipFill>
         <p:spPr bwMode="auto">
           <a:xfrm>
-            <a:off x="1381716" y="1166099"/>
-            <a:ext cx="6380568" cy="3360181"/>
+            <a:off x="1388008" y="1166099"/>
+            <a:ext cx="6367983" cy="3360181"/>
           </a:xfrm>
           <a:prstGeom prst="rect">
             <a:avLst/>
@@ -16457,8 +16457,8 @@
         </p:blipFill>
         <p:spPr bwMode="auto">
           <a:xfrm>
-            <a:off x="457200" y="1309489"/>
-            <a:ext cx="8229600" cy="3073400"/>
+            <a:off x="457200" y="1303139"/>
+            <a:ext cx="8229600" cy="3086100"/>
           </a:xfrm>
           <a:prstGeom prst="rect">
             <a:avLst/>
@@ -18370,8 +18370,8 @@
         </p:blipFill>
         <p:spPr bwMode="auto">
           <a:xfrm>
-            <a:off x="1583075" y="1166099"/>
-            <a:ext cx="5977850" cy="3360181"/>
+            <a:off x="1589367" y="1166099"/>
+            <a:ext cx="5965265" cy="3360181"/>
           </a:xfrm>
           <a:prstGeom prst="rect">
             <a:avLst/>

--- a/Lessons/10_convolutional_networks/Slides/convolutional_networks_slides.pptx
+++ b/Lessons/10_convolutional_networks/Slides/convolutional_networks_slides.pptx
@@ -588,7 +588,7 @@
             </a:pPr>
             <a:r>
               <a:rPr/>
-              <a:t>Frame the three hours before any content. Last week’s networks treated the 64 pixels of a digit as 64 unrelated numbers. Today exactly one assumption changes — that the inputs have an arrangement worth keeping — and the whole lesson is the consequence of that single change, measured rather than asserted.</a:t>
+              <a:t>Frame the three hours before any content. Last week’s networks treated the 64 pixels of a digit as 64 unrelated numbers. Today exactly one assumption changes - that the inputs have an arrangement worth keeping - and the whole lesson is the consequence of that single change, measured rather than asserted.</a:t>
             </a:r>
           </a:p>
           <a:p>
@@ -740,7 +740,7 @@
             </a:pPr>
             <a:r>
               <a:rPr/>
-              <a:t>Ask them which of the two properties they think is doing more of the work. Hold the answers — section 9 measures it, and the answer is not an even split.</a:t>
+              <a:t>Ask them which of the two properties they think is doing more of the work. Hold the answers - section 9 measures it, and the answer is not an even split.</a:t>
             </a:r>
           </a:p>
         </p:txBody>
@@ -976,7 +976,7 @@
             </a:pPr>
             <a:r>
               <a:rPr/>
-              <a:t>Ask the room how many independent detectors a 24×24 image would need if each covers a 3×3 patch. About 576 of them — trained separately. Handout section 2.</a:t>
+              <a:t>Ask the room how many independent detectors a 24×24 image would need if each covers a 3×3 patch. About 576 of them - trained separately. Handout section 2.</a:t>
             </a:r>
           </a:p>
         </p:txBody>
@@ -1322,7 +1322,7 @@
             </a:pPr>
             <a:r>
               <a:rPr/>
-              <a:t>The phrase “inductive bias” belongs here, and it is worth defining carefully: an assumption built into the model’s structure rather than learned from data. Weight sharing is one. It is not free — it is only correct because of the second property two slides ago — but when it is correct, it is worth more than any amount of tuning. Handout section 2.</a:t>
+              <a:t>The phrase “inductive bias” belongs here, and it is worth defining carefully: an assumption built into the model’s structure rather than learned from data. Weight sharing is one. It is not free - it is only correct because of the second property two slides ago - but when it is correct, it is worth more than any amount of tuning. Handout section 2.</a:t>
             </a:r>
           </a:p>
         </p:txBody>
@@ -1418,7 +1418,7 @@
             </a:pPr>
             <a:r>
               <a:rPr/>
-              <a:t>Typical answers, and what to do with each. “The darkest pixel” — good instinct, but defeated by the film thickness, so ask what it should be compared against. “The difference between a pixel and its neighbours” — that is the contrast kernel, and they have just invented section 3.3. “The variance of the image” — close, but a smooth brightness gradient has variance too.</a:t>
+              <a:t>Typical answers, and what to do with each. “The darkest pixel” - good instinct, but defeated by the film thickness, so ask what it should be compared against. “The difference between a pixel and its neighbours” - that is the contrast kernel, and they have just invented section 3.3. “The variance of the image” - close, but a smooth brightness gradient has variance too.</a:t>
             </a:r>
           </a:p>
           <a:p>
@@ -1528,21 +1528,21 @@
             </a:pPr>
             <a:r>
               <a:rPr/>
-              <a:t>Two consequences worth naming immediately. The output is an image, not a number — smaller, and often much deeper, but still laid out in space. And the same nine weights produced every entry of it, which is the weight sharing from the previous segment made concrete.</a:t>
-            </a:r>
-          </a:p>
-          <a:p>
-            <a:pPr lvl="0" indent="0" marL="0">
-              <a:buNone/>
-            </a:pPr>
-          </a:p>
-          <a:p>
-            <a:pPr lvl="0" indent="0" marL="0">
-              <a:buNone/>
-            </a:pPr>
-            <a:r>
-              <a:rPr/>
-              <a:t>Ask the room what the output of the sliding window means at each position. It is the answer to one fixed question — “how much does the pattern I encode look like what is here?” — asked everywhere at once. Handout section 3.1.</a:t>
+              <a:t>Two consequences worth naming immediately. The output is an image, not a number - smaller, and often much deeper, but still laid out in space. And the same nine weights produced every entry of it, which is the weight sharing from the previous segment made concrete.</a:t>
+            </a:r>
+          </a:p>
+          <a:p>
+            <a:pPr lvl="0" indent="0" marL="0">
+              <a:buNone/>
+            </a:pPr>
+          </a:p>
+          <a:p>
+            <a:pPr lvl="0" indent="0" marL="0">
+              <a:buNone/>
+            </a:pPr>
+            <a:r>
+              <a:rPr/>
+              <a:t>Ask the room what the output of the sliding window means at each position. It is the answer to one fixed question - “how much does the pattern I encode look like what is here?” - asked everywhere at once. Handout section 3.1.</a:t>
             </a:r>
           </a:p>
         </p:txBody>
@@ -1638,7 +1638,7 @@
             </a:pPr>
             <a:r>
               <a:rPr/>
-              <a:t>Two details to point at. The image index is r + i, so the window moves with r — that is the sliding. And the kernel index is i alone, with no r in it: the same weight is used at every output position, which is weight sharing written down in one subscript.</a:t>
+              <a:t>Two details to point at. The image index is r + i, so the window moves with r - that is the sliding. And the kernel index is i alone, with no r in it: the same weight is used at every output position, which is weight sharing written down in one subscript.</a:t>
             </a:r>
           </a:p>
           <a:p>
@@ -1748,7 +1748,7 @@
             </a:pPr>
             <a:r>
               <a:rPr/>
-              <a:t>Say why it genuinely does not matter here: the kernel is learned. Whichever orientation the operation uses, gradient descent will find the weights that suit it, and the two conventions reach mirror-image kernels with identical outputs. It matters only when you write a kernel down by hand, which we do in ten minutes — and the four kernels we write are all symmetric.</a:t>
+              <a:t>Say why it genuinely does not matter here: the kernel is learned. Whichever orientation the operation uses, gradient descent will find the weights that suit it, and the two conventions reach mirror-image kernels with identical outputs. It matters only when you write a kernel down by hand, which we do in ten minutes - and the four kernels we write are all symmetric.</a:t>
             </a:r>
           </a:p>
           <a:p>
@@ -1968,7 +1968,7 @@
             </a:pPr>
             <a:r>
               <a:rPr/>
-              <a:t>The floor is doing real work rather than tidying up. When the stride does not divide the available positions evenly, the last window would hang off the edge of the image, and it is simply not taken — those pixels are never looked at by that layer. Students who have only ever used </a:t>
+              <a:t>The floor is doing real work rather than tidying up. When the stride does not divide the available positions evenly, the last window would hang off the edge of the image, and it is simply not taken - those pixels are never looked at by that layer. Students who have only ever used </a:t>
             </a:r>
             <a:r>
               <a:rPr>
@@ -2074,7 +2074,7 @@
             </a:pPr>
             <a:r>
               <a:rPr/>
-              <a:t>Walk two of these out loud. Row one: 24 plus nothing, minus 3, over 1, plus 1 is 22 — the two lost rows are the positions where a 3×3 window would hang over the edge. Row two: 24 plus 2, minus 3, plus 1 is 24, and the padding has bought those two rows back.</a:t>
+              <a:t>Walk two of these out loud. Row one: 24 plus nothing, minus 3, over 1, plus 1 is 22 - the two lost rows are the positions where a 3×3 window would hang over the edge. Row two: 24 plus 2, minus 3, plus 1 is 24, and the padding has bought those two rows back.</a:t>
             </a:r>
           </a:p>
           <a:p>
@@ -2426,21 +2426,21 @@
             </a:r>
             <a:r>
               <a:rPr/>
-              <a:t> — it cannot see the film thickness, because a smoothly varying background is locally almost constant. It responds only to how much a pixel differs from its own neighbourhood, which is precisely the definition of a defect on this line.</a:t>
-            </a:r>
-          </a:p>
-          <a:p>
-            <a:pPr lvl="0" indent="0" marL="0">
-              <a:buNone/>
-            </a:pPr>
-          </a:p>
-          <a:p>
-            <a:pPr lvl="0" indent="0" marL="0">
-              <a:buNone/>
-            </a:pPr>
-            <a:r>
-              <a:rPr/>
-              <a:t>Nine numbers, chosen in advance, and the hardest part of the problem — the varying background that defeats every brightness threshold — is simply gone. Handout section 3.3.</a:t>
+              <a:t> - it cannot see the film thickness, because a smoothly varying background is locally almost constant. It responds only to how much a pixel differs from its own neighbourhood, which is precisely the definition of a defect on this line.</a:t>
+            </a:r>
+          </a:p>
+          <a:p>
+            <a:pPr lvl="0" indent="0" marL="0">
+              <a:buNone/>
+            </a:pPr>
+          </a:p>
+          <a:p>
+            <a:pPr lvl="0" indent="0" marL="0">
+              <a:buNone/>
+            </a:pPr>
+            <a:r>
+              <a:rPr/>
+              <a:t>Nine numbers, chosen in advance, and the hardest part of the problem - the varying background that defeats every brightness threshold - is simply gone. Handout section 3.3.</a:t>
             </a:r>
           </a:p>
         </p:txBody>
@@ -2522,7 +2522,7 @@
             </a:pPr>
             <a:r>
               <a:rPr/>
-              <a:t>Say the last bullet twice. No gradient descent, no labels, no training set — nine numbers written down from an argument about what the problem requires, and the two classes are already separated by a factor of nearly three.</a:t>
+              <a:t>Say the last bullet twice. No gradient descent, no labels, no training set - nine numbers written down from an argument about what the problem requires, and the two classes are already separated by a factor of nearly three.</a:t>
             </a:r>
           </a:p>
           <a:p>
@@ -2670,7 +2670,7 @@
             </a:pPr>
             <a:r>
               <a:rPr/>
-              <a:t>Second priority is the equivariance check, which prints a difference of exactly zero rather than something small. Have them predict what it will print first — most expect a tiny floating-point residual, and the fact that it is bit-exact away from the borders says something stronger than “approximately equal”.</a:t>
+              <a:t>Second priority is the equivariance check, which prints a difference of exactly zero rather than something small. Have them predict what it will print first - most expect a tiny floating-point residual, and the fact that it is bit-exact away from the borders says something stronger than “approximately equal”.</a:t>
             </a:r>
           </a:p>
           <a:p>
@@ -2766,7 +2766,7 @@
             </a:pPr>
             <a:r>
               <a:rPr/>
-              <a:t>Twelve minutes. What comes back after the break is the property the whole idea rests on, and then the experiment this lesson exists for — the one that produces today’s number. Worth saying so before they leave the room.</a:t>
+              <a:t>Twelve minutes. What comes back after the break is the property the whole idea rests on, and then the experiment this lesson exists for - the one that produces today’s number. Worth saying so before they leave the room.</a:t>
             </a:r>
           </a:p>
         </p:txBody>
@@ -2848,21 +2848,21 @@
             </a:pPr>
             <a:r>
               <a:rPr/>
-              <a:t>Define equivariance carefully, because it is routinely confused with invariance, and today’s architecture uses both — one in the convolution and one in the pooling. Equivariant means the output changes in a predictable, corresponding way: shift the input by four pixels and the feature map shifts by four pixels, unchanged in value.</a:t>
-            </a:r>
-          </a:p>
-          <a:p>
-            <a:pPr lvl="0" indent="0" marL="0">
-              <a:buNone/>
-            </a:pPr>
-          </a:p>
-          <a:p>
-            <a:pPr lvl="0" indent="0" marL="0">
-              <a:buNone/>
-            </a:pPr>
-            <a:r>
-              <a:rPr/>
-              <a:t>The proof is one line from the definition: the sum at the shifted position runs over exactly the pixels the unshifted sum ran over. But notebook 01 checks it rather than believing it, and the answer is not “small” — away from the borders it is bit-for-bit identical.</a:t>
+              <a:t>Define equivariance carefully, because it is routinely confused with invariance, and today’s architecture uses both - one in the convolution and one in the pooling. Equivariant means the output changes in a predictable, corresponding way: shift the input by four pixels and the feature map shifts by four pixels, unchanged in value.</a:t>
+            </a:r>
+          </a:p>
+          <a:p>
+            <a:pPr lvl="0" indent="0" marL="0">
+              <a:buNone/>
+            </a:pPr>
+          </a:p>
+          <a:p>
+            <a:pPr lvl="0" indent="0" marL="0">
+              <a:buNone/>
+            </a:pPr>
+            <a:r>
+              <a:rPr/>
+              <a:t>The proof is one line from the definition: the sum at the shifted position runs over exactly the pixels the unshifted sum ran over. But notebook 01 checks it rather than believing it, and the answer is not “small” - away from the borders it is bit-for-bit identical.</a:t>
             </a:r>
           </a:p>
           <a:p>
@@ -2980,7 +2980,7 @@
             </a:r>
             <a:r>
               <a:rPr/>
-              <a:t> say. It does not say the answer is unchanged by a shift — the feature map moves. Turning “it moved” into “it does not matter where it was” is a separate operation, and it is the next segment: pooling.</a:t>
+              <a:t> say. It does not say the answer is unchanged by a shift - the feature map moves. Turning “it moved” into “it does not matter where it was” is a separate operation, and it is the next segment: pooling.</a:t>
             </a:r>
           </a:p>
           <a:p>
@@ -3222,7 +3222,7 @@
             </a:pPr>
             <a:r>
               <a:rPr/>
-              <a:t>Ask the room to imagine the same figure for a dense unit. Panel one fires; panels two, three and four are whatever those unrelated weights happen to produce, which is noise. Then tell them we are about to measure exactly that, and it is worse than noise — it is below chance. Handout section 4.1.</a:t>
+              <a:t>Ask the room to imagine the same figure for a dense unit. Panel one fires; panels two, three and four are whatever those unrelated weights happen to produce, which is noise. Then tell them we are about to measure exactly that, and it is worse than noise - it is below chance. Handout section 4.1.</a:t>
             </a:r>
           </a:p>
         </p:txBody>
@@ -3348,7 +3348,7 @@
             </a:pPr>
             <a:r>
               <a:rPr/>
-              <a:t>The 3.129 is the same number from the hand-written kernel: pool that feature map three times, from 24×24 to 12×12 to 6×6 to 3×3, and the maximum is 3.129 at every stage. Of course it is — that is what taking a maximum does. Say it anyway, because seeing it survive four sizes is what makes pooling feel safe. Handout section 4.2.</a:t>
+              <a:t>The 3.129 is the same number from the hand-written kernel: pool that feature map three times, from 24×24 to 12×12 to 6×6 to 3×3, and the maximum is 3.129 at every stage. Of course it is - that is what taking a maximum does. Say it anyway, because seeing it survive four sizes is what makes pooling feel safe. Handout section 4.2.</a:t>
             </a:r>
           </a:p>
         </p:txBody>
@@ -3562,7 +3562,7 @@
             </a:pPr>
             <a:r>
               <a:rPr/>
-              <a:t>Invariance is the goal here: after pooling, moving the defect by a pixel often produces a literally identical output. Receptive field growth is the reason depth works at all — stack pooling and small kernels and a 3×3 window at layer four sees most of the die, for nine weights. Precision loss is the bill.</a:t>
+              <a:t>Invariance is the goal here: after pooling, moving the defect by a pixel often produces a literally identical output. Receptive field growth is the reason depth works at all - stack pooling and small kernels and a 3×3 window at layer four sees most of the die, for nine weights. Precision loss is the bill.</a:t>
             </a:r>
           </a:p>
           <a:p>
@@ -3686,7 +3686,7 @@
             </a:pPr>
             <a:r>
               <a:rPr/>
-              <a:t>Against this, lesson 9’s dense network on the same images has 213,761 parameters — a factor of 139. Both are trained with the same optimiser, the same loss and the same epoch budget throughout this lesson, which is what makes every comparison today about architecture rather than about tuning.</a:t>
+              <a:t>Against this, lesson 9’s dense network on the same images has 213,761 parameters - a factor of 139. Both are trained with the same optimiser, the same loss and the same epoch budget throughout this lesson, which is what makes every comparison today about architecture rather than about tuning.</a:t>
             </a:r>
           </a:p>
           <a:p>
@@ -4032,7 +4032,7 @@
             </a:pPr>
             <a:r>
               <a:rPr/>
-              <a:t>The pairing is the point. Every other lesson in this course has traded capacity for performance in the expected direction — more trees, more units, more flexibility. Here the smaller model wins by twenty-nine points, and it wins because of what it cannot do rather than what it can.</a:t>
+              <a:t>The pairing is the point. Every other lesson in this course has traded capacity for performance in the expected direction - more trees, more units, more flexibility. Here the smaller model wins by twenty-nine points, and it wins because of what it cannot do rather than what it can.</a:t>
             </a:r>
           </a:p>
           <a:p>
@@ -4156,7 +4156,7 @@
             </a:pPr>
             <a:r>
               <a:rPr/>
-              <a:t>Take a show of hands on the dense network’s score on the moved band. Most rooms predict a drop of ten or twenty points — the reasoning being that it has learned something about scratches in general and will retain part of it. That reasoning is sound for almost every kind of distribution shift you will meet, and it is wrong here. Handout section 6.</a:t>
+              <a:t>Take a show of hands on the dense network’s score on the moved band. Most rooms predict a drop of ten or twenty points - the reasoning being that it has learned something about scratches in general and will retain part of it. That reasoning is sound for almost every kind of distribution shift you will meet, and it is wrong here. Handout section 6.</a:t>
             </a:r>
           </a:p>
         </p:txBody>
@@ -4238,7 +4238,7 @@
             </a:pPr>
             <a:r>
               <a:rPr/>
-              <a:t>Say it slowly and then say it again. A dense network scoring 0.8567 on defects in the half of the die it was trained on scores 0.4617 — </a:t>
+              <a:t>Say it slowly and then say it again. A dense network scoring 0.8567 on defects in the half of the die it was trained on scores 0.4617 - </a:t>
             </a:r>
             <a:r>
               <a:rPr b="1"/>
@@ -4246,7 +4246,7 @@
             </a:r>
             <a:r>
               <a:rPr/>
-              <a:t> — on the identical defect moved to the other half. The convolutional network goes from 0.9800 to 0.9847, which is noise around the ceiling.</a:t>
+              <a:t> - on the identical defect moved to the other half. The convolutional network goes from 0.9800 to 0.9847, which is noise around the ceiling.</a:t>
             </a:r>
           </a:p>
           <a:p>
@@ -4612,7 +4612,7 @@
             </a:pPr>
             <a:r>
               <a:rPr/>
-              <a:t>Here the features do not mean anything different — they are simply not the features carrying the signal any more. Pixel 100 was the evidence; pixel 400 is now the evidence; and pixel 400’s weights were trained exclusively on clean silicon. There is no partial credit available.</a:t>
+              <a:t>Here the features do not mean anything different - they are simply not the features carrying the signal any more. Pixel 100 was the evidence; pixel 400 is now the evidence; and pixel 400’s weights were trained exclusively on clean silicon. There is no partial credit available.</a:t>
             </a:r>
           </a:p>
           <a:p>
@@ -4854,21 +4854,21 @@
             </a:pPr>
             <a:r>
               <a:rPr/>
-              <a:t>Two details of the experiment are worth copying, because both are easy to get wrong in a way that flatters your conclusion. Both arms got the same number of epochs — an augmented set is five times larger, so equal wall-clock would have quietly given it five times fewer passes per image; an earlier version of this experiment did that and reported 1.6 points instead of 8.1. And the shift is drawn per image, not per batch: one offset applied to a whole copy just adds four more fixed positions.</a:t>
-            </a:r>
-          </a:p>
-          <a:p>
-            <a:pPr lvl="0" indent="0" marL="0">
-              <a:buNone/>
-            </a:pPr>
-          </a:p>
-          <a:p>
-            <a:pPr lvl="0" indent="0" marL="0">
-              <a:buNone/>
-            </a:pPr>
-            <a:r>
-              <a:rPr/>
-              <a:t>Then give the rule: augment for invariances no layer can express — brightness, contrast, small rotations — where it is indispensable. Handout section 7.</a:t>
+              <a:t>Two details of the experiment are worth copying, because both are easy to get wrong in a way that flatters your conclusion. Both arms got the same number of epochs - an augmented set is five times larger, so equal wall-clock would have quietly given it five times fewer passes per image; an earlier version of this experiment did that and reported 1.6 points instead of 8.1. And the shift is drawn per image, not per batch: one offset applied to a whole copy just adds four more fixed positions.</a:t>
+            </a:r>
+          </a:p>
+          <a:p>
+            <a:pPr lvl="0" indent="0" marL="0">
+              <a:buNone/>
+            </a:pPr>
+          </a:p>
+          <a:p>
+            <a:pPr lvl="0" indent="0" marL="0">
+              <a:buNone/>
+            </a:pPr>
+            <a:r>
+              <a:rPr/>
+              <a:t>Then give the rule: augment for invariances no layer can express - brightness, contrast, small rotations - where it is indispensable. Handout section 7.</a:t>
             </a:r>
           </a:p>
         </p:txBody>
@@ -4950,7 +4950,7 @@
             </a:pPr>
             <a:r>
               <a:rPr/>
-              <a:t>Test accuracy against training-set size, logarithmic horizontal axis. The convolutional network reaches the ceiling at 500 images and stays flat. The dense network at 8,000 — sixteen times more data — is still 0.235 below it.</a:t>
+              <a:t>Test accuracy against training-set size, logarithmic horizontal axis. The convolutional network reaches the ceiling at 500 images and stays flat. The dense network at 8,000 - sixteen times more data - is still 0.235 below it.</a:t>
             </a:r>
           </a:p>
           <a:p>
@@ -5098,7 +5098,7 @@
             </a:pPr>
             <a:r>
               <a:rPr/>
-              <a:t>Second priority is the augmentation comparison, specifically the epoch argument. Show them the two lines of code that equalise the passes per image and ask what the result would have been without them — it is in the notebook, and it is 1.6 points instead of 8.1. That is a lesson about experimental hygiene rather than about augmentation, and it is the lesson 5 habit applied to deep learning.</a:t>
+              <a:t>Second priority is the augmentation comparison, specifically the epoch argument. Show them the two lines of code that equalise the passes per image and ask what the result would have been without them - it is in the notebook, and it is 1.6 points instead of 8.1. That is a lesson about experimental hygiene rather than about augmentation, and it is the lesson 5 habit applied to deep learning.</a:t>
             </a:r>
           </a:p>
           <a:p>
@@ -5334,7 +5334,7 @@
             </a:r>
             <a:r>
               <a:rPr/>
-              <a:t>. Any detector that has committed to reporting local darkness is not merely uninformed about the new defect — it is pointed the wrong way.</a:t>
+              <a:t>. Any detector that has committed to reporting local darkness is not merely uninformed about the new defect - it is pointed the wrong way.</a:t>
             </a:r>
           </a:p>
           <a:p>
@@ -5444,21 +5444,21 @@
             </a:pPr>
             <a:r>
               <a:rPr/>
-              <a:t>The justification is architectural rather than mystical. The first layer of any image network learns local contrast operators — we saw eight of them rediscovering the zero-sum trick — and there is nothing about local contrast that is specific to scratches. If that is true, those layers are worth borrowing.</a:t>
-            </a:r>
-          </a:p>
-          <a:p>
-            <a:pPr lvl="0" indent="0" marL="0">
-              <a:buNone/>
-            </a:pPr>
-          </a:p>
-          <a:p>
-            <a:pPr lvl="0" indent="0" marL="0">
-              <a:buNone/>
-            </a:pPr>
-            <a:r>
-              <a:rPr/>
-              <a:t>Flag the two knobs now, because the next three slides are one measurement each of them. Which source task, and how much of the borrowed network you allow to change. The received wisdom on both — “any related task”, “freeze the base” — is what this segment tests. Handout section 10.</a:t>
+              <a:t>The justification is architectural rather than mystical. The first layer of any image network learns local contrast operators - we saw eight of them rediscovering the zero-sum trick - and there is nothing about local contrast that is specific to scratches. If that is true, those layers are worth borrowing.</a:t>
+            </a:r>
+          </a:p>
+          <a:p>
+            <a:pPr lvl="0" indent="0" marL="0">
+              <a:buNone/>
+            </a:pPr>
+          </a:p>
+          <a:p>
+            <a:pPr lvl="0" indent="0" marL="0">
+              <a:buNone/>
+            </a:pPr>
+            <a:r>
+              <a:rPr/>
+              <a:t>Flag the two knobs now, because the next three slides are one measurement each of them. Which source task, and how much of the borrowed network you allow to change. The received wisdom on both - “any related task”, “freeze the base” - is what this segment tests. Handout section 10.</a:t>
             </a:r>
           </a:p>
         </p:txBody>
@@ -5782,7 +5782,7 @@
             </a:pPr>
             <a:r>
               <a:rPr/>
-              <a:t>At 25 images nothing works — both arms sit at chance. There is too little data to fit even a small head onto good features, so the borrowed weights have nothing to attach to. Between 50 and 200 the warm start is worth 9 to 17 points and the gain </a:t>
+              <a:t>At 25 images nothing works - both arms sit at chance. There is too little data to fit even a small head onto good features, so the borrowed weights have nothing to attach to. Between 50 and 200 the warm start is worth 9 to 17 points and the gain </a:t>
             </a:r>
             <a:r>
               <a:rPr i="1"/>
@@ -5900,7 +5900,7 @@
             </a:pPr>
             <a:r>
               <a:rPr/>
-              <a:t>First, the gap between the warm-started curve and the from-scratch curve opens and then closes. That is the window. If you had run this experiment at a single dataset size — which is what most people do — you could have concluded anything you liked, including that transfer is useless, depending on which size you picked.</a:t>
+              <a:t>First, the gap between the warm-started curve and the from-scratch curve opens and then closes. That is the window. If you had run this experiment at a single dataset size - which is what most people do - you could have concluded anything you liked, including that transfer is useless, depending on which size you picked.</a:t>
             </a:r>
           </a:p>
           <a:p>
@@ -6284,7 +6284,7 @@
             </a:pPr>
             <a:r>
               <a:rPr/>
-              <a:t>Two cells to protect. The five-size transfer sweep, because the window only exists as a shape and any single row of it supports the wrong conclusion — and because they can see for themselves how tempting it would have been to run one size and publish.</a:t>
+              <a:t>Two cells to protect. The five-size transfer sweep, because the window only exists as a shape and any single row of it supports the wrong conclusion - and because they can see for themselves how tempting it would have been to run one size and publish.</a:t>
             </a:r>
           </a:p>
           <a:p>
@@ -6408,21 +6408,21 @@
             </a:pPr>
             <a:r>
               <a:rPr/>
-              <a:t>Apply one fixed permutation to the 576 pixel positions, apply it to every image in the dataset, and retrain from scratch. Adjacency is destroyed — neighbouring pixels are now scattered across the image — while every pixel value is preserved.</a:t>
-            </a:r>
-          </a:p>
-          <a:p>
-            <a:pPr lvl="0" indent="0" marL="0">
-              <a:buNone/>
-            </a:pPr>
-          </a:p>
-          <a:p>
-            <a:pPr lvl="0" indent="0" marL="0">
-              <a:buNone/>
-            </a:pPr>
-            <a:r>
-              <a:rPr/>
-              <a:t>On grading a die, the convolution does not notice. Read that again: the architecture defined entirely by adjacency loses nothing when adjacency is destroyed. It looks wrong until you ask what the task requires — “is there a patch of unusual local contrast somewhere” — and notice that a scattered permutation leaves those pixels somewhere, still extreme. On naming the defect type, which is a question about </a:t>
+              <a:t>Apply one fixed permutation to the 576 pixel positions, apply it to every image in the dataset, and retrain from scratch. Adjacency is destroyed - neighbouring pixels are now scattered across the image - while every pixel value is preserved.</a:t>
+            </a:r>
+          </a:p>
+          <a:p>
+            <a:pPr lvl="0" indent="0" marL="0">
+              <a:buNone/>
+            </a:pPr>
+          </a:p>
+          <a:p>
+            <a:pPr lvl="0" indent="0" marL="0">
+              <a:buNone/>
+            </a:pPr>
+            <a:r>
+              <a:rPr/>
+              <a:t>On grading a die, the convolution does not notice. Read that again: the architecture defined entirely by adjacency loses nothing when adjacency is destroyed. It looks wrong until you ask what the task requires - “is there a patch of unusual local contrast somewhere” - and notice that a scattered permutation leaves those pixels somewhere, still extreme. On naming the defect type, which is a question about </a:t>
             </a:r>
             <a:r>
               <a:rPr i="1"/>
@@ -6636,7 +6636,7 @@
             </a:pPr>
             <a:r>
               <a:rPr/>
-              <a:t>Say why that matters beyond this lesson. Weight sharing is not unique to convolution — other architectures supply it in other forms, for sequences and for sets. If your task needs only weight sharing, convolution is one option among several, and the choice should be made on other grounds. If it needs locality too, you are asking for something more specific.</a:t>
+              <a:t>Say why that matters beyond this lesson. Weight sharing is not unique to convolution - other architectures supply it in other forms, for sequences and for sets. If your task needs only weight sharing, convolution is one option among several, and the choice should be made on other grounds. If it needs locality too, you are asking for something more specific.</a:t>
             </a:r>
           </a:p>
           <a:p>
@@ -6760,7 +6760,7 @@
             </a:pPr>
             <a:r>
               <a:rPr/>
-              <a:t>This is the most honest thing that can be said in favour of learned representations, and it cuts both ways. It found a good feature without being told. It would equally have found a bad one had the data rewarded that — which is every leakage story from lesson 1, in a new architecture. Handout sections 3.3 and 9.</a:t>
+              <a:t>This is the most honest thing that can be said in favour of learned representations, and it cuts both ways. It found a good feature without being told. It would equally have found a bad one had the data rewarded that - which is every leakage story from lesson 1, in a new architecture. Handout sections 3.3 and 9.</a:t>
             </a:r>
           </a:p>
         </p:txBody>
@@ -7108,21 +7108,21 @@
             </a:r>
             <a:r>
               <a:rPr/>
-              <a:t> pixel to an unusual value, and 300 trees splitting on individual pixels cover enough of them. That is the forest’s own inductive bias — the answer depends on a few features crossing thresholds — and it happens to fit.</a:t>
-            </a:r>
-          </a:p>
-          <a:p>
-            <a:pPr lvl="0" indent="0" marL="0">
-              <a:buNone/>
-            </a:pPr>
-          </a:p>
-          <a:p>
-            <a:pPr lvl="0" indent="0" marL="0">
-              <a:buNone/>
-            </a:pPr>
-            <a:r>
-              <a:rPr/>
-              <a:t>Two failures are instructive. k-nearest neighbours collapses to 0.4970 because Euclidean distance over 576 pixels is dominated by the smooth background — the curse of dimensionality from lesson 6, exactly. And lesson 9’s dense network, at 0.7430, sits </a:t>
+              <a:t> pixel to an unusual value, and 300 trees splitting on individual pixels cover enough of them. That is the forest’s own inductive bias - the answer depends on a few features crossing thresholds - and it happens to fit.</a:t>
+            </a:r>
+          </a:p>
+          <a:p>
+            <a:pPr lvl="0" indent="0" marL="0">
+              <a:buNone/>
+            </a:pPr>
+          </a:p>
+          <a:p>
+            <a:pPr lvl="0" indent="0" marL="0">
+              <a:buNone/>
+            </a:pPr>
+            <a:r>
+              <a:rPr/>
+              <a:t>Two failures are instructive. k-nearest neighbours collapses to 0.4970 because Euclidean distance over 576 pixels is dominated by the smooth background - the curse of dimensionality from lesson 6, exactly. And lesson 9’s dense network, at 0.7430, sits </a:t>
             </a:r>
             <a:r>
               <a:rPr i="1"/>
@@ -7226,7 +7226,7 @@
             </a:pPr>
             <a:r>
               <a:rPr/>
-              <a:t>Say what that costs and what it buys. It cost nine numbers and an argument about film thickness — twenty minutes of thinking by someone who understood the physics. It bought the entire problem, for every model family, including the one that scored 0.4970 on raw pixels.</a:t>
+              <a:t>Say what that costs and what it buys. It cost nine numbers and an argument about film thickness - twenty minutes of thinking by someone who understood the physics. It bought the entire problem, for every model family, including the one that scored 0.4970 on raw pixels.</a:t>
             </a:r>
           </a:p>
           <a:p>
@@ -7350,7 +7350,7 @@
             </a:pPr>
             <a:r>
               <a:rPr/>
-              <a:t>The handout’s closing table gives seven if-then rules for choosing — read it. The one that matters most is the last: if you cannot say what assumption your model encodes, you have not chosen a model, you have chosen a default.</a:t>
+              <a:t>The handout’s closing table gives seven if-then rules for choosing - read it. The one that matters most is the last: if you cannot say what assumption your model encodes, you have not chosen a model, you have chosen a default.</a:t>
             </a:r>
           </a:p>
           <a:p>
@@ -7460,21 +7460,21 @@
             </a:pPr>
             <a:r>
               <a:rPr/>
-              <a:t>Say the scheduling problem plainly rather than letting them discover it. That same week is the project peer review week — each of them reads two other projects and is read by two — and the reviews they write are assessed alongside the project they submit. Two pieces of work in one week. Anyone who starts the exercise on Thursday will do both badly.</a:t>
-            </a:r>
-          </a:p>
-          <a:p>
-            <a:pPr lvl="0" indent="0" marL="0">
-              <a:buNone/>
-            </a:pPr>
-          </a:p>
-          <a:p>
-            <a:pPr lvl="0" indent="0" marL="0">
-              <a:buNone/>
-            </a:pPr>
-            <a:r>
-              <a:rPr/>
-              <a:t>Two standing requirements that today’s material makes easy to forget. Any claim that one architecture beats another needs the spread it was measured against. And any accuracy needs the ceiling it was measured against — on this data that is 0.98, and a model reported at 0.98 may be perfect rather than merely good.</a:t>
+              <a:t>Say the scheduling problem plainly rather than letting them discover it. That same week is the project peer review week - each of them reads two other projects and is read by two - and the reviews they write are assessed alongside the project they submit. Two pieces of work in one week. Anyone who starts the exercise on Thursday will do both badly.</a:t>
+            </a:r>
+          </a:p>
+          <a:p>
+            <a:pPr lvl="0" indent="0" marL="0">
+              <a:buNone/>
+            </a:pPr>
+          </a:p>
+          <a:p>
+            <a:pPr lvl="0" indent="0" marL="0">
+              <a:buNone/>
+            </a:pPr>
+            <a:r>
+              <a:rPr/>
+              <a:t>Two standing requirements that today’s material makes easy to forget. Any claim that one architecture beats another needs the spread it was measured against. And any accuracy needs the ceiling it was measured against - on this data that is 0.98, and a model reported at 0.98 may be perfect rather than merely good.</a:t>
             </a:r>
           </a:p>
         </p:txBody>
@@ -7578,21 +7578,21 @@
             </a:pPr>
             <a:r>
               <a:rPr/>
-              <a:t>Then step back over the ten weeks. They arrived able to fit models. What this course tried to add is the habit of asking what a number is measured against — a ceiling, a spread, a baseline, a fold that was kept honest — and the habit of naming the assumption a model encodes before trusting what it produces. Those two habits are what separate a result from a plausible-looking result, and nothing in this field has ever made them less necessary.</a:t>
-            </a:r>
-          </a:p>
-          <a:p>
-            <a:pPr lvl="0" indent="0" marL="0">
-              <a:buNone/>
-            </a:pPr>
-          </a:p>
-          <a:p>
-            <a:pPr lvl="0" indent="0" marL="0">
-              <a:buNone/>
-            </a:pPr>
-            <a:r>
-              <a:rPr/>
-              <a:t>One forward-looking sentence, and only one: every system built on top of these fundamentals — including the ones this degree programme covers elsewhere — is still an argument about which inductive bias to encode and what to measure it against, so the questions you have practised for ten weeks are the ones that transfer.</a:t>
+              <a:t>Then step back over the ten weeks. They arrived able to fit models. What this course tried to add is the habit of asking what a number is measured against - a ceiling, a spread, a baseline, a fold that was kept honest - and the habit of naming the assumption a model encodes before trusting what it produces. Those two habits are what separate a result from a plausible-looking result, and nothing in this field has ever made them less necessary.</a:t>
+            </a:r>
+          </a:p>
+          <a:p>
+            <a:pPr lvl="0" indent="0" marL="0">
+              <a:buNone/>
+            </a:pPr>
+          </a:p>
+          <a:p>
+            <a:pPr lvl="0" indent="0" marL="0">
+              <a:buNone/>
+            </a:pPr>
+            <a:r>
+              <a:rPr/>
+              <a:t>One forward-looking sentence, and only one: every system built on top of these fundamentals - including the ones this degree programme covers elsewhere - is still an argument about which inductive bias to encode and what to measure it against, so the questions you have practised for ten weeks are the ones that transfer.</a:t>
             </a:r>
           </a:p>
           <a:p>
@@ -7688,7 +7688,7 @@
             </a:pPr>
             <a:r>
               <a:rPr/>
-              <a:t>This course has produced one number per lesson worth carrying out of the room, and this is the last time the list gets extended. Read the five out — they are lessons 1, 2, 3, 8 and 9 — and say that the sixth arrives at about half past one this afternoon.</a:t>
+              <a:t>This course has produced one number per lesson worth carrying out of the room, and this is the last time the list gets extended. Read the five out - they are lessons 1, 2, 3, 8 and 9 - and say that the sixth arrives at about half past one this afternoon.</a:t>
             </a:r>
           </a:p>
           <a:p>
@@ -7798,7 +7798,7 @@
             </a:pPr>
             <a:r>
               <a:rPr/>
-              <a:t>Introduce the problem physically before any picture. Meridian Instruments is the fictional sensor maker from last week; this week we are one step upstream, on the wafer line where the sensors are cut. A die is a small square of silicon, photographed under a microscope at 24 by 24 pixels — 576 numbers — and graded pass or fail by an automatic station.</a:t>
+              <a:t>Introduce the problem physically before any picture. Meridian Instruments is the fictional sensor maker from last week; this week we are one step upstream, on the wafer line where the sensors are cut. A die is a small square of silicon, photographed under a microscope at 24 by 24 pixels - 576 numbers - and graded pass or fail by an automatic station.</a:t>
             </a:r>
           </a:p>
           <a:p>
@@ -7930,7 +7930,7 @@
             </a:pPr>
             <a:r>
               <a:rPr/>
-              <a:t>Point at two panels with visibly different background brightness and the same defect. That is the film thickness varying, and it is why absolute brightness is useless here. Then point at how few pixels the defect actually occupies — about seven of 576, roughly one percent of the image.</a:t>
+              <a:t>Point at two panels with visibly different background brightness and the same defect. That is the film thickness varying, and it is why absolute brightness is useless here. Then point at how few pixels the defect actually occupies - about seven of 576, roughly one percent of the image.</a:t>
             </a:r>
           </a:p>
           <a:p>
@@ -11017,7 +11017,7 @@
             </a:pPr>
             <a:r>
               <a:rPr/>
-              <a:t>Lesson 10 — Convolutional Networks and Course Synthesis</a:t>
+              <a:t>Lesson 10: Convolutional Networks and Course Synthesis</a:t>
             </a:r>
           </a:p>
         </p:txBody>
@@ -11053,7 +11053,7 @@
             <a:br/>
             <a:r>
               <a:rPr/>
-              <a:t>Fabio Antonini — Università degli Studi dell’Aquila</a:t>
+              <a:t>Fabio Antonini, Università degli Studi dell’Aquila</a:t>
             </a:r>
           </a:p>
         </p:txBody>
@@ -11249,7 +11249,7 @@
             </a:r>
             <a:r>
               <a:rPr/>
-              <a:t> — a handful of the 576 pixels matter, the rest is irrelevant</a:t>
+              <a:t>: a handful of the 576 pixels matter, the rest is irrelevant</a:t>
             </a:r>
           </a:p>
           <a:p>
@@ -11260,7 +11260,7 @@
             </a:r>
             <a:r>
               <a:rPr/>
-              <a:t> — top left and bottom right are the same event</a:t>
+              <a:t>: top left and bottom right are the same event</a:t>
             </a:r>
           </a:p>
           <a:p>
@@ -11373,7 +11373,7 @@
             <a:pPr lvl="0"/>
             <a:r>
               <a:rPr/>
-              <a:t>A high draw at 2.5 standard deviations — not a bug</a:t>
+              <a:t>A high draw at 2.5 standard deviations, not a bug</a:t>
             </a:r>
           </a:p>
           <a:p>
@@ -11859,7 +11859,7 @@
             <a:pPr lvl="0"/>
             <a:r>
               <a:rPr/>
-              <a:t>It is not a smaller layer — it is a differently </a:t>
+              <a:t>It is not a smaller layer: it is a differently </a:t>
             </a:r>
             <a:r>
               <a:rPr b="1"/>
@@ -11987,7 +11987,7 @@
             <a:pPr lvl="0"/>
             <a:r>
               <a:rPr/>
-              <a:t>Not a memory saving — a </a:t>
+              <a:t>Not a memory saving: a </a:t>
             </a:r>
             <a:r>
               <a:rPr b="1"/>
@@ -12183,7 +12183,7 @@
             <a:pPr lvl="0"/>
             <a:r>
               <a:rPr/>
-              <a:t>Take a small array of weights — the </a:t>
+              <a:t>Take a small array of weights: the </a:t>
             </a:r>
             <a:r>
               <a:rPr b="1"/>
@@ -12522,7 +12522,7 @@
             <a:pPr lvl="0"/>
             <a:r>
               <a:rPr/>
-              <a:t>Notebook 01 agrees with scipy to 8.9 × 10⁻¹⁶ — rounding, not error</a:t>
+              <a:t>Notebook 01 agrees with scipy to 8.9 × 10⁻¹⁶: rounding, not error</a:t>
             </a:r>
           </a:p>
         </p:txBody>
@@ -13084,7 +13084,7 @@
             </a:r>
             <a:r>
               <a:rPr/>
-              <a:t> — Keras calls this </a:t>
+              <a:t>: Keras calls this </a:t>
             </a:r>
             <a:r>
               <a:rPr>
@@ -13108,7 +13108,7 @@
             </a:r>
             <a:r>
               <a:rPr/>
-              <a:t> — the cheap alternative to pooling</a:t>
+              <a:t>: the cheap alternative to pooling</a:t>
             </a:r>
           </a:p>
           <a:p>
@@ -13493,7 +13493,7 @@
             <a:pPr lvl="0"/>
             <a:r>
               <a:rPr/>
-              <a:t>Four kernels by hand — and the zero-sum one that works</a:t>
+              <a:t>Four kernels by hand, and the zero-sum one that works</a:t>
             </a:r>
           </a:p>
           <a:p>
@@ -14287,14 +14287,14 @@
             </a:r>
             <a:r>
               <a:rPr/>
-              <a:t> — one pixel of shift often changes nothing</a:t>
+              <a:t>: one pixel of shift often changes nothing</a:t>
             </a:r>
           </a:p>
           <a:p>
             <a:pPr lvl="0"/>
             <a:r>
               <a:rPr/>
-              <a:t>Enlarges the receptive field — 3×3 after pooling covers 6×6 of the image</a:t>
+              <a:t>Enlarges the receptive field: 3×3 after pooling covers 6×6 of the image</a:t>
             </a:r>
           </a:p>
           <a:p>
@@ -15913,7 +15913,7 @@
             <a:pPr lvl="0"/>
             <a:r>
               <a:rPr/>
-              <a:t>Tie the shared entries, zero the rest — it is strictly </a:t>
+              <a:t>Tie the shared entries, zero the rest: it is strictly </a:t>
             </a:r>
             <a:r>
               <a:rPr b="1"/>
@@ -16022,7 +16022,7 @@
             <a:pPr lvl="0"/>
             <a:r>
               <a:rPr/>
-              <a:t>Show the dense network shifted copies — a moved scratch is still a scratch</a:t>
+              <a:t>Show the dense network shifted copies: a moved scratch is still a scratch</a:t>
             </a:r>
           </a:p>
           <a:p>
@@ -16268,7 +16268,7 @@
             <a:pPr lvl="0"/>
             <a:r>
               <a:rPr/>
-              <a:t>The permutation test — hold your prediction</a:t>
+              <a:t>The permutation test: hold your prediction</a:t>
             </a:r>
           </a:p>
         </p:txBody>
@@ -16377,7 +16377,7 @@
             <a:pPr lvl="0"/>
             <a:r>
               <a:rPr/>
-              <a:t>Waiting six months is not an answer — the line is shipping now</a:t>
+              <a:t>Waiting six months is not an answer: the line is shipping now</a:t>
             </a:r>
           </a:p>
           <a:p>
@@ -16813,7 +16813,7 @@
             </a:r>
             <a:r>
               <a:rPr/>
-              <a:t> — a receipt, not a result</a:t>
+              <a:t>: a receipt, not a result</a:t>
             </a:r>
           </a:p>
           <a:p>
@@ -17968,7 +17968,7 @@
             </a:r>
             <a:r>
               <a:rPr/>
-              <a:t> — no cost at all</a:t>
+              <a:t>, no cost at all</a:t>
             </a:r>
           </a:p>
           <a:p>
@@ -17983,7 +17983,7 @@
             </a:r>
             <a:r>
               <a:rPr/>
-              <a:t> — 4.5 points</a:t>
+              <a:t>, 4.5 points</a:t>
             </a:r>
           </a:p>
           <a:p>
@@ -18973,7 +18973,7 @@
                       </a:pPr>
                       <a:r>
                         <a:rPr/>
-                        <a:t>—</a:t>
+                        <a:t>-</a:t>
                       </a:r>
                     </a:p>
                   </a:txBody>
@@ -19020,7 +19020,7 @@
                       </a:pPr>
                       <a:r>
                         <a:rPr/>
-                        <a:t>—</a:t>
+                        <a:t>-</a:t>
                       </a:r>
                     </a:p>
                   </a:txBody>
@@ -19283,7 +19283,7 @@
             </a:pPr>
             <a:r>
               <a:rPr/>
-              <a:t>Homework — the last one</a:t>
+              <a:t>Homework: the last one</a:t>
             </a:r>
           </a:p>
         </p:txBody>
@@ -19343,7 +19343,7 @@
             </a:r>
             <a:r>
               <a:rPr/>
-              <a:t> — plan for both</a:t>
+              <a:t>: plan for both</a:t>
             </a:r>
           </a:p>
           <a:p>
@@ -19441,7 +19441,7 @@
             <a:pPr lvl="0"/>
             <a:r>
               <a:rPr/>
-              <a:t>The convolutional one went 0.9800 to 0.9847 — because it cannot ask </a:t>
+              <a:t>The convolutional one went 0.9800 to 0.9847, because it cannot ask </a:t>
             </a:r>
             <a:r>
               <a:rPr i="1"/>
@@ -19466,7 +19466,7 @@
             <a:pPr lvl="0"/>
             <a:r>
               <a:rPr/>
-              <a:t>Thank you — and good luck with the project</a:t>
+              <a:t>Thank you, and good luck with the project</a:t>
             </a:r>
           </a:p>
         </p:txBody>
@@ -19569,7 +19569,7 @@
             </a:r>
             <a:r>
               <a:rPr/>
-              <a:t> — and is negative outside it</a:t>
+              <a:t>, and is negative outside it</a:t>
             </a:r>
           </a:p>
           <a:p>
@@ -19697,7 +19697,7 @@
             </a:r>
             <a:r>
               <a:rPr/>
-              <a:t> — one coefficient of an overfitted fit</a:t>
+              <a:t>: one coefficient of an overfitted fit</a:t>
             </a:r>
           </a:p>
           <a:p>

--- a/Lessons/10_convolutional_networks/Slides/convolutional_networks_slides.pptx
+++ b/Lessons/10_convolutional_networks/Slides/convolutional_networks_slides.pptx
@@ -19693,11 +19693,11 @@
             <a:pPr lvl="0"/>
             <a:r>
               <a:rPr b="1"/>
-              <a:t>247,514</a:t>
-            </a:r>
-            <a:r>
-              <a:rPr/>
-              <a:t>: one coefficient of an overfitted fit</a:t>
+              <a:t>365</a:t>
+            </a:r>
+            <a:r>
+              <a:rPr/>
+              <a:t>: the largest coefficient a penalty of 0.01 leaves, against billions without one</a:t>
             </a:r>
           </a:p>
           <a:p>

--- a/Lessons/10_convolutional_networks/Slides/convolutional_networks_slides.pptx
+++ b/Lessons/10_convolutional_networks/Slides/convolutional_networks_slides.pptx
@@ -12595,8 +12595,8 @@
         </p:blipFill>
         <p:spPr bwMode="auto">
           <a:xfrm>
-            <a:off x="457200" y="2331839"/>
-            <a:ext cx="8229600" cy="1028700"/>
+            <a:off x="457200" y="2344539"/>
+            <a:ext cx="8229599" cy="1003300"/>
           </a:xfrm>
           <a:prstGeom prst="rect">
             <a:avLst/>

--- a/Lessons/10_convolutional_networks/Slides/convolutional_networks_slides.pptx
+++ b/Lessons/10_convolutional_networks/Slides/convolutional_networks_slides.pptx
@@ -16363,7 +16363,7 @@
             <a:pPr lvl="0"/>
             <a:r>
               <a:rPr/>
-              <a:t>By Friday there are a few dozen labelled photographs</a:t>
+              <a:t>By Friday, a few dozen labelled photographs</a:t>
             </a:r>
           </a:p>
           <a:p>
@@ -16377,14 +16377,14 @@
             <a:pPr lvl="0"/>
             <a:r>
               <a:rPr/>
-              <a:t>Waiting six months is not an answer: the line is shipping now</a:t>
+              <a:t>Waiting six months is no answer: the line ships now</a:t>
             </a:r>
           </a:p>
           <a:p>
             <a:pPr lvl="0"/>
             <a:r>
               <a:rPr/>
-              <a:t>So: can we borrow from a network trained on something else?</a:t>
+              <a:t>Can we borrow from a network trained on something else?</a:t>
             </a:r>
           </a:p>
         </p:txBody>
@@ -16798,22 +16798,18 @@
             </a:r>
             <a:r>
               <a:rPr/>
-              <a:t> detector; typing forces general descriptions</a:t>
+              <a:t> detector; typing forces description</a:t>
             </a:r>
           </a:p>
           <a:p>
             <a:pPr lvl="0"/>
-            <a:r>
-              <a:rPr/>
-              <a:t>The source task reaches </a:t>
-            </a:r>
             <a:r>
               <a:rPr b="1"/>
               <a:t>0.9993</a:t>
             </a:r>
             <a:r>
               <a:rPr/>
-              <a:t>: a receipt, not a result</a:t>
+              <a:t> on the source task: a receipt, not a result</a:t>
             </a:r>
           </a:p>
           <a:p>
@@ -16828,7 +16824,7 @@
             </a:r>
             <a:r>
               <a:rPr/>
-              <a:t> the network to learn</a:t>
+              <a:t> it to learn</a:t>
             </a:r>
           </a:p>
         </p:txBody>
@@ -19682,11 +19678,11 @@
             <a:pPr lvl="0"/>
             <a:r>
               <a:rPr b="1"/>
-              <a:t>98 of 128</a:t>
-            </a:r>
-            <a:r>
-              <a:rPr/>
-              <a:t> imputed rows that borrowed from the test set</a:t>
+              <a:t>94 of 128</a:t>
+            </a:r>
+            <a:r>
+              <a:rPr/>
+              <a:t> imputed rows borrowed from the test set</a:t>
             </a:r>
           </a:p>
           <a:p>
@@ -19697,7 +19693,7 @@
             </a:r>
             <a:r>
               <a:rPr/>
-              <a:t>: the largest coefficient a penalty of 0.01 leaves, against billions without one</a:t>
+              <a:t>: the largest coefficient a 0.01 penalty leaves</a:t>
             </a:r>
           </a:p>
           <a:p>

--- a/Lessons/10_convolutional_networks/Slides/convolutional_networks_slides.pptx
+++ b/Lessons/10_convolutional_networks/Slides/convolutional_networks_slides.pptx
@@ -7446,7 +7446,7 @@
             </a:pPr>
             <a:r>
               <a:rPr/>
-              <a:t>Set it explicitly and say the deadline out loud: Friday 4 December, 23:59. It is the last exercise of the course.</a:t>
+              <a:t>Set it explicitly and say the deadline out loud: Friday 4 December, 23:59 - the only exercise with no lesson after it, so it runs to the end of the day. It is the last exercise of the course.</a:t>
             </a:r>
           </a:p>
           <a:p>

--- a/Lessons/10_convolutional_networks/Slides/convolutional_networks_slides.pptx
+++ b/Lessons/10_convolutional_networks/Slides/convolutional_networks_slides.pptx
@@ -1844,7 +1844,7 @@
             </a:pPr>
             <a:r>
               <a:rPr/>
-              <a:t>Hand exercise 9 back briefly. One sentence on what went well, one on the recurring gap. Two things came up repeatedly: gradients written by hand and trusted without the four-line check, and single-seed runs whose differences were smaller than the seed-to-seed spread would have been.</a:t>
+              <a:t>Nothing to collect and nothing to hand back - discuss it. Two things to listen for: gradients written by hand and trusted without the four-line check, and single-seed runs whose differences were smaller than the seed-to-seed spread would have been.</a:t>
             </a:r>
           </a:p>
           <a:p>
@@ -7446,7 +7446,7 @@
             </a:pPr>
             <a:r>
               <a:rPr/>
-              <a:t>Set it explicitly and say the deadline out loud: Friday 4 December, 23:59 - the only exercise with no lesson after it, so it runs to the end of the day. It is the last exercise of the course.</a:t>
+              <a:t>Set it explicitly and say what is different about it: no lesson follows to discuss it, so this one is worked for the exam alone. It is the last exercise of the course.</a:t>
             </a:r>
           </a:p>
           <a:p>
@@ -13752,7 +13752,7 @@
             </a:pPr>
             <a:r>
               <a:rPr/>
-              <a:t>Exercise 9 returned</a:t>
+              <a:t>Exercise 9, before we start</a:t>
             </a:r>
           </a:p>
         </p:txBody>
@@ -13780,7 +13780,7 @@
             <a:pPr lvl="0"/>
             <a:r>
               <a:rPr/>
-              <a:t>Marks were for the </a:t>
+              <a:t>What counts is the </a:t>
             </a:r>
             <a:r>
               <a:rPr b="1"/>
@@ -13795,7 +13795,7 @@
             <a:pPr lvl="0"/>
             <a:r>
               <a:rPr/>
-              <a:t>Recurring gap: a hand-written backward pass, never gradient-checked</a:t>
+              <a:t>The gap to watch for: a hand-written backward pass, never gradient-checked</a:t>
             </a:r>
           </a:p>
           <a:p>
@@ -19311,11 +19311,7 @@
             </a:r>
             <a:r>
               <a:rPr/>
-              <a:t>, due </a:t>
-            </a:r>
-            <a:r>
-              <a:rPr b="1"/>
-              <a:t>Friday 4 December 2026, 23:59</a:t>
+              <a:t>, no lesson left to discuss it: work it for the exam</a:t>
             </a:r>
           </a:p>
           <a:p>

--- a/Lessons/10_convolutional_networks/Slides/convolutional_networks_slides.pptx
+++ b/Lessons/10_convolutional_networks/Slides/convolutional_networks_slides.pptx
@@ -11575,7 +11575,7 @@
           </p:nvPr>
         </p:nvGraphicFramePr>
         <p:xfrm>
-          <a:off x="457200" y="1193800"/>
+          <a:off x="457200" y="1166099"/>
           <a:ext cx="8229600" cy="3390900"/>
         </p:xfrm>
         <a:graphic>
@@ -12296,8 +12296,8 @@
         </p:blipFill>
         <p:spPr bwMode="auto">
           <a:xfrm>
-            <a:off x="457200" y="2122289"/>
-            <a:ext cx="8229600" cy="1447800"/>
+            <a:off x="457200" y="2154039"/>
+            <a:ext cx="8229600" cy="1384300"/>
           </a:xfrm>
           <a:prstGeom prst="rect">
             <a:avLst/>
@@ -12595,8 +12595,8 @@
         </p:blipFill>
         <p:spPr bwMode="auto">
           <a:xfrm>
-            <a:off x="457200" y="2344539"/>
-            <a:ext cx="8229599" cy="1003300"/>
+            <a:off x="457200" y="2395339"/>
+            <a:ext cx="8229600" cy="901700"/>
           </a:xfrm>
           <a:prstGeom prst="rect">
             <a:avLst/>
@@ -12672,7 +12672,7 @@
           </p:nvPr>
         </p:nvGraphicFramePr>
         <p:xfrm>
-          <a:off x="457200" y="1193800"/>
+          <a:off x="457200" y="1166099"/>
           <a:ext cx="8229600" cy="3390900"/>
         </p:xfrm>
         <a:graphic>
@@ -13270,8 +13270,8 @@
         </p:blipFill>
         <p:spPr bwMode="auto">
           <a:xfrm>
-            <a:off x="457200" y="2173089"/>
-            <a:ext cx="8229600" cy="1346200"/>
+            <a:off x="457200" y="2217539"/>
+            <a:ext cx="8229600" cy="1257300"/>
           </a:xfrm>
           <a:prstGeom prst="rect">
             <a:avLst/>
@@ -13890,8 +13890,8 @@
         </p:blipFill>
         <p:spPr bwMode="auto">
           <a:xfrm>
-            <a:off x="457205" y="2401690"/>
-            <a:ext cx="8229590" cy="888999"/>
+            <a:off x="457200" y="2458839"/>
+            <a:ext cx="8229599" cy="774700"/>
           </a:xfrm>
           <a:prstGeom prst="rect">
             <a:avLst/>
@@ -14396,7 +14396,7 @@
           </p:nvPr>
         </p:nvGraphicFramePr>
         <p:xfrm>
-          <a:off x="457200" y="1193800"/>
+          <a:off x="457200" y="1166099"/>
           <a:ext cx="8229600" cy="3390900"/>
         </p:xfrm>
         <a:graphic>
@@ -15416,7 +15416,7 @@
           </p:nvPr>
         </p:nvGraphicFramePr>
         <p:xfrm>
-          <a:off x="457200" y="1193800"/>
+          <a:off x="457200" y="1166099"/>
           <a:ext cx="8229600" cy="3390900"/>
         </p:xfrm>
         <a:graphic>
@@ -16892,7 +16892,7 @@
           </p:nvPr>
         </p:nvGraphicFramePr>
         <p:xfrm>
-          <a:off x="457200" y="1193800"/>
+          <a:off x="457200" y="1166099"/>
           <a:ext cx="8229600" cy="3390900"/>
         </p:xfrm>
         <a:graphic>
@@ -17370,7 +17370,7 @@
           </p:nvPr>
         </p:nvGraphicFramePr>
         <p:xfrm>
-          <a:off x="457200" y="1193800"/>
+          <a:off x="457200" y="1166099"/>
           <a:ext cx="8229600" cy="3390900"/>
         </p:xfrm>
         <a:graphic>
@@ -18136,7 +18136,7 @@
           </p:nvPr>
         </p:nvGraphicFramePr>
         <p:xfrm>
-          <a:off x="457200" y="1193800"/>
+          <a:off x="457200" y="1166099"/>
           <a:ext cx="8229600" cy="3390900"/>
         </p:xfrm>
         <a:graphic>
@@ -18676,7 +18676,7 @@
           </p:nvPr>
         </p:nvGraphicFramePr>
         <p:xfrm>
-          <a:off x="457200" y="1193800"/>
+          <a:off x="457200" y="1166099"/>
           <a:ext cx="8229600" cy="3390900"/>
         </p:xfrm>
         <a:graphic>

--- a/Lessons/10_convolutional_networks/Slides/convolutional_networks_slides.pptx
+++ b/Lessons/10_convolutional_networks/Slides/convolutional_networks_slides.pptx
@@ -12296,8 +12296,8 @@
         </p:blipFill>
         <p:spPr bwMode="auto">
           <a:xfrm>
-            <a:off x="457200" y="2154039"/>
-            <a:ext cx="8229600" cy="1384300"/>
+            <a:off x="457200" y="2147689"/>
+            <a:ext cx="8229600" cy="1397000"/>
           </a:xfrm>
           <a:prstGeom prst="rect">
             <a:avLst/>
@@ -12595,8 +12595,8 @@
         </p:blipFill>
         <p:spPr bwMode="auto">
           <a:xfrm>
-            <a:off x="457200" y="2395339"/>
-            <a:ext cx="8229600" cy="901700"/>
+            <a:off x="457200" y="2344539"/>
+            <a:ext cx="8229599" cy="1003300"/>
           </a:xfrm>
           <a:prstGeom prst="rect">
             <a:avLst/>
@@ -13270,8 +13270,8 @@
         </p:blipFill>
         <p:spPr bwMode="auto">
           <a:xfrm>
-            <a:off x="457200" y="2217539"/>
-            <a:ext cx="8229600" cy="1257300"/>
+            <a:off x="457200" y="2211189"/>
+            <a:ext cx="8229600" cy="1270000"/>
           </a:xfrm>
           <a:prstGeom prst="rect">
             <a:avLst/>
@@ -13890,8 +13890,8 @@
         </p:blipFill>
         <p:spPr bwMode="auto">
           <a:xfrm>
-            <a:off x="457200" y="2458839"/>
-            <a:ext cx="8229599" cy="774700"/>
+            <a:off x="457200" y="2465189"/>
+            <a:ext cx="8229600" cy="762000"/>
           </a:xfrm>
           <a:prstGeom prst="rect">
             <a:avLst/>

--- a/Lessons/10_convolutional_networks/Slides/convolutional_networks_slides.pptx
+++ b/Lessons/10_convolutional_networks/Slides/convolutional_networks_slides.pptx
@@ -12282,7 +12282,7 @@
       </p:sp>
       <p:pic>
         <p:nvPicPr>
-          <p:cNvPr descr="eq_b39ba04b88.png" id="0" name="Picture 1"/>
+          <p:cNvPr descr="eq_0a191c8f63.png" id="0" name="Picture 1"/>
           <p:cNvPicPr>
             <a:picLocks noGrp="1" noChangeAspect="1"/>
           </p:cNvPicPr>
@@ -12296,8 +12296,8 @@
         </p:blipFill>
         <p:spPr bwMode="auto">
           <a:xfrm>
-            <a:off x="457200" y="2147689"/>
-            <a:ext cx="8229600" cy="1397000"/>
+            <a:off x="457200" y="2160389"/>
+            <a:ext cx="8229600" cy="1371600"/>
           </a:xfrm>
           <a:prstGeom prst="rect">
             <a:avLst/>
